--- a/Presentations/2025Dec17_Coatings_Final.pptx
+++ b/Presentations/2025Dec17_Coatings_Final.pptx
@@ -114,6 +114,11 @@
       </a:defRPr>
     </a:lvl9pPr>
   </p:defaultTextStyle>
+  <p:extLst>
+    <p:ext uri="{EFAFB233-063F-42B5-8137-9DF3F51BA10A}">
+      <p15:sldGuideLst xmlns:p15="http://schemas.microsoft.com/office/powerpoint/2012/main"/>
+    </p:ext>
+  </p:extLst>
 </p:presentation>
 </file>
 
@@ -264,7 +269,7 @@
           <a:p>
             <a:fld id="{67EE4D0B-6D6A-2943-8E2F-599D1F2B448E}" type="datetimeFigureOut">
               <a:rPr lang="en-US" smtClean="0"/>
-              <a:t>12/17/25</a:t>
+              <a:t>3/24/26</a:t>
             </a:fld>
             <a:endParaRPr lang="en-US"/>
           </a:p>
@@ -462,7 +467,7 @@
           <a:p>
             <a:fld id="{67EE4D0B-6D6A-2943-8E2F-599D1F2B448E}" type="datetimeFigureOut">
               <a:rPr lang="en-US" smtClean="0"/>
-              <a:t>12/17/25</a:t>
+              <a:t>3/24/26</a:t>
             </a:fld>
             <a:endParaRPr lang="en-US"/>
           </a:p>
@@ -670,7 +675,7 @@
           <a:p>
             <a:fld id="{67EE4D0B-6D6A-2943-8E2F-599D1F2B448E}" type="datetimeFigureOut">
               <a:rPr lang="en-US" smtClean="0"/>
-              <a:t>12/17/25</a:t>
+              <a:t>3/24/26</a:t>
             </a:fld>
             <a:endParaRPr lang="en-US"/>
           </a:p>
@@ -868,7 +873,7 @@
           <a:p>
             <a:fld id="{67EE4D0B-6D6A-2943-8E2F-599D1F2B448E}" type="datetimeFigureOut">
               <a:rPr lang="en-US" smtClean="0"/>
-              <a:t>12/17/25</a:t>
+              <a:t>3/24/26</a:t>
             </a:fld>
             <a:endParaRPr lang="en-US"/>
           </a:p>
@@ -1143,7 +1148,7 @@
           <a:p>
             <a:fld id="{67EE4D0B-6D6A-2943-8E2F-599D1F2B448E}" type="datetimeFigureOut">
               <a:rPr lang="en-US" smtClean="0"/>
-              <a:t>12/17/25</a:t>
+              <a:t>3/24/26</a:t>
             </a:fld>
             <a:endParaRPr lang="en-US"/>
           </a:p>
@@ -1408,7 +1413,7 @@
           <a:p>
             <a:fld id="{67EE4D0B-6D6A-2943-8E2F-599D1F2B448E}" type="datetimeFigureOut">
               <a:rPr lang="en-US" smtClean="0"/>
-              <a:t>12/17/25</a:t>
+              <a:t>3/24/26</a:t>
             </a:fld>
             <a:endParaRPr lang="en-US"/>
           </a:p>
@@ -1820,7 +1825,7 @@
           <a:p>
             <a:fld id="{67EE4D0B-6D6A-2943-8E2F-599D1F2B448E}" type="datetimeFigureOut">
               <a:rPr lang="en-US" smtClean="0"/>
-              <a:t>12/17/25</a:t>
+              <a:t>3/24/26</a:t>
             </a:fld>
             <a:endParaRPr lang="en-US"/>
           </a:p>
@@ -1961,7 +1966,7 @@
           <a:p>
             <a:fld id="{67EE4D0B-6D6A-2943-8E2F-599D1F2B448E}" type="datetimeFigureOut">
               <a:rPr lang="en-US" smtClean="0"/>
-              <a:t>12/17/25</a:t>
+              <a:t>3/24/26</a:t>
             </a:fld>
             <a:endParaRPr lang="en-US"/>
           </a:p>
@@ -2074,7 +2079,7 @@
           <a:p>
             <a:fld id="{67EE4D0B-6D6A-2943-8E2F-599D1F2B448E}" type="datetimeFigureOut">
               <a:rPr lang="en-US" smtClean="0"/>
-              <a:t>12/17/25</a:t>
+              <a:t>3/24/26</a:t>
             </a:fld>
             <a:endParaRPr lang="en-US"/>
           </a:p>
@@ -2385,7 +2390,7 @@
           <a:p>
             <a:fld id="{67EE4D0B-6D6A-2943-8E2F-599D1F2B448E}" type="datetimeFigureOut">
               <a:rPr lang="en-US" smtClean="0"/>
-              <a:t>12/17/25</a:t>
+              <a:t>3/24/26</a:t>
             </a:fld>
             <a:endParaRPr lang="en-US"/>
           </a:p>
@@ -2673,7 +2678,7 @@
           <a:p>
             <a:fld id="{67EE4D0B-6D6A-2943-8E2F-599D1F2B448E}" type="datetimeFigureOut">
               <a:rPr lang="en-US" smtClean="0"/>
-              <a:t>12/17/25</a:t>
+              <a:t>3/24/26</a:t>
             </a:fld>
             <a:endParaRPr lang="en-US"/>
           </a:p>
@@ -2914,7 +2919,7 @@
           <a:p>
             <a:fld id="{67EE4D0B-6D6A-2943-8E2F-599D1F2B448E}" type="datetimeFigureOut">
               <a:rPr lang="en-US" smtClean="0"/>
-              <a:t>12/17/25</a:t>
+              <a:t>3/24/26</a:t>
             </a:fld>
             <a:endParaRPr lang="en-US"/>
           </a:p>
@@ -4865,8 +4870,8 @@
           </a:p>
         </p:txBody>
       </p:sp>
-      <mc:AlternateContent xmlns:mc="http://schemas.openxmlformats.org/markup-compatibility/2006">
-        <mc:Choice xmlns:a14="http://schemas.microsoft.com/office/drawing/2010/main" Requires="a14">
+      <mc:AlternateContent xmlns:mc="http://schemas.openxmlformats.org/markup-compatibility/2006" xmlns:a14="http://schemas.microsoft.com/office/drawing/2010/main">
+        <mc:Choice Requires="a14">
           <p:sp>
             <p:nvSpPr>
               <p:cNvPr id="61" name="TextBox 60">
@@ -4935,7 +4940,7 @@
             </p:txBody>
           </p:sp>
         </mc:Choice>
-        <mc:Fallback>
+        <mc:Fallback xmlns="">
           <p:sp>
             <p:nvSpPr>
               <p:cNvPr id="61" name="TextBox 60">
